--- a/dist/초5/영어/상호작용과문화/초5_영어_상호작용과문화_01_길묻고안내하기_학생용.pptx
+++ b/dist/초5/영어/상호작용과문화/초5_영어_상호작용과문화_01_길묻고안내하기_학생용.pptx
@@ -119,20 +119,20 @@
   <p:extLst>
     <p:ext uri="{521415D9-36F7-43E2-AB2F-B90AF26B5E84}">
       <p14:sectionLst xmlns:p14="http://schemas.microsoft.com/office/powerpoint/2010/main">
-        <p14:section name="도입" id="{cef1bf93-eaa5-04ff-7616-9efb25c2f61a}">
+        <p14:section name="도입" id="{9f099acc-3f45-93a2-1d5e-ea97f676eecf}">
           <p14:sldIdLst>
             <p14:sldId id="256"/>
             <p14:sldId id="257"/>
           </p14:sldIdLst>
         </p14:section>
-        <p14:section name="개념" id="{a7524e9c-f770-0ff3-c30f-fd915aa41e8c}">
+        <p14:section name="개념" id="{d5d7f8a3-24e8-4df7-e68d-a2de057e9ea2}">
           <p14:sldIdLst>
             <p14:sldId id="258"/>
             <p14:sldId id="259"/>
             <p14:sldId id="260"/>
           </p14:sldIdLst>
         </p14:section>
-        <p14:section name="연습" id="{abf2c4ef-2378-3851-1e8d-a1652bd9c3db}">
+        <p14:section name="연습" id="{d81bc55d-4acc-63b9-2eb9-2dcc6d960c07}">
           <p14:sldIdLst>
             <p14:sldId id="261"/>
             <p14:sldId id="262"/>
@@ -140,18 +140,18 @@
             <p14:sldId id="264"/>
           </p14:sldIdLst>
         </p14:section>
-        <p14:section name="확인" id="{c9569703-591b-c262-6113-dc4c00c96ec8}">
+        <p14:section name="확인" id="{2e965808-23aa-b1e3-4440-4d7a07d27bac}">
           <p14:sldIdLst>
             <p14:sldId id="265"/>
             <p14:sldId id="266"/>
           </p14:sldIdLst>
         </p14:section>
-        <p14:section name="정리" id="{6dd33a3a-c4d3-5abf-dcc4-e43b1975df7b}">
+        <p14:section name="정리" id="{d345b64e-d35f-6589-3927-78fb561d0301}">
           <p14:sldIdLst>
             <p14:sldId id="267"/>
           </p14:sldIdLst>
         </p14:section>
-        <p14:section name="보충" id="{d3367455-93df-9169-1570-1c05d546e84f}">
+        <p14:section name="보충" id="{849da19f-e2c6-1b44-6974-d1fea3f43c8f}">
           <p14:sldIdLst>
             <p14:sldId id="268"/>
           </p14:sldIdLst>
